--- a/decks/triple-b5/triple-b5_ch6_fungal-protist.pptx
+++ b/decks/triple-b5/triple-b5_ch6_fungal-protist.pptx
@@ -125,29 +125,29 @@
   <p:extLst>
     <p:ext uri="{521415D9-36F7-43E2-AB2F-B90AF26B5E84}">
       <p14:sectionLst xmlns:p14="http://schemas.microsoft.com/office/powerpoint/2010/main">
-        <p14:section name="Opening" id="{433c6afe-2de4-c07d-2f43-77a34c5dc275}">
+        <p14:section name="Opening" id="{90abaa53-b7b9-e5e8-4dd9-e34562dc80f1}">
           <p14:sldIdLst>
             <p14:sldId id="256"/>
           </p14:sldIdLst>
         </p14:section>
-        <p14:section name="Gate" id="{466a1184-7f12-66c6-13a8-902bd907ec3b}">
+        <p14:section name="Gate" id="{48d7589e-1a28-63ff-d4b9-182c541bb1af}">
           <p14:sldIdLst>
             <p14:sldId id="257"/>
             <p14:sldId id="258"/>
           </p14:sldIdLst>
         </p14:section>
-        <p14:section name="Pre-teach" id="{65f8031e-7b41-86c5-7ea1-4c9d65a41f5e}">
+        <p14:section name="Pre-teach" id="{44844d28-d463-7f39-6fa9-84a1e4db3bed}">
           <p14:sldIdLst>
             <p14:sldId id="259"/>
           </p14:sldIdLst>
         </p14:section>
-        <p14:section name="Read-along" id="{35fe6687-9f7a-875e-585b-a84e94ee0ef2}">
+        <p14:section name="Read-along" id="{4ecdab61-fc04-c1aa-4089-75f799fcb5b0}">
           <p14:sldIdLst>
             <p14:sldId id="260"/>
             <p14:sldId id="261"/>
           </p14:sldIdLst>
         </p14:section>
-        <p14:section name="Teach" id="{f486e57d-a127-276a-bb8b-a4a94c7af7e8}">
+        <p14:section name="Teach" id="{1334b7de-fa0c-cfb9-4032-6f05312b6fd3}">
           <p14:sldIdLst>
             <p14:sldId id="262"/>
             <p14:sldId id="263"/>
@@ -156,7 +156,7 @@
             <p14:sldId id="266"/>
           </p14:sldIdLst>
         </p14:section>
-        <p14:section name="Routes" id="{4d5aacc1-1094-c724-cbb5-4b8afac74df1}">
+        <p14:section name="Routes" id="{01533bfc-0a41-f984-94a7-8144ffea6703}">
           <p14:sldIdLst>
             <p14:sldId id="267"/>
             <p14:sldId id="268"/>
@@ -164,12 +164,12 @@
             <p14:sldId id="270"/>
           </p14:sldIdLst>
         </p14:section>
-        <p14:section name="Close" id="{49532847-dfc0-e234-4b0c-13fb8dbd04fe}">
+        <p14:section name="Close" id="{94513018-8821-7823-748d-e32bf5154774}">
           <p14:sldIdLst>
             <p14:sldId id="271"/>
           </p14:sldIdLst>
         </p14:section>
-        <p14:section name="Answers" id="{6bbf2e92-1006-bf22-01bc-9d6878272678}">
+        <p14:section name="Answers" id="{a93e1c53-773a-be53-2070-797759433e91}">
           <p14:sldIdLst>
             <p14:sldId id="272"/>
             <p14:sldId id="273"/>
@@ -1599,7 +1599,7 @@
               <a:t>Do now — retrieval. Silent, no notes, no help: recall comes before any support. Give about four minutes.
 1. Which type of pathogen causes rose black spot?  →  A   A fungus
 2. Malaria is caused by a protist called ___.  →  Plasmodium
-3. How does rose black spot reduce the growth of a rose plant?  →  A   Leaves drop early, so less photosynthesis takes place
+3. How does rose black spot reduce the growth of a rose plant?  →  D   Leaves drop early, so less photosynthesis takes place
 Circulate: who gets 3/3 (Stretch route), 2/3 (Core), 0–1 (Support)? Use this to route pupils later in the lesson.</a:t>
             </a:r>
             <a:endParaRPr lang="en-US" dirty="0"/>
@@ -1691,7 +1691,7 @@
               <a:t>Answers — pupils mark their own in a different colour, then hands up for 3/3, 2/3, 1/3.
 1. A   A fungus. Rose black spot is a fungal disease spread by water or wind, treated with fungicides and by removing infected leaves.
 2. Plasmodium. Plasmodium is the protist that causes malaria. Its life cycle includes the mosquito, which carries it from person to person.
-3. A   Leaves drop early, so less photosynthesis takes place. The spotted leaves turn yellow and drop early, so the plant has less leaf area for photosynthesis and makes less food.
+3. D   Leaves drop early, so less photosynthesis takes place. The spotted leaves turn yellow and drop early, so the plant has less leaf area for photosynthesis and makes less food.
 Say the route each score points to: 3/3 Stretch, 2/3 Core, 0–1 Support. Pupils may choose to move up.</a:t>
             </a:r>
             <a:endParaRPr lang="en-US" dirty="0"/>
@@ -7073,7 +7073,7 @@
                 <a:ea typeface="Calibri" pitchFamily="34" charset="-122"/>
                 <a:cs typeface="Calibri" pitchFamily="34" charset="-120"/>
               </a:rPr>
-              <a:t>It stops people being bitten while they sleep</a:t>
+              <a:t>It makes people immune to the protist</a:t>
             </a:r>
             <a:endParaRPr lang="en-US" sz="2600" dirty="0"/>
           </a:p>
@@ -7110,7 +7110,7 @@
                 <a:ea typeface="Calibri" pitchFamily="34" charset="-122"/>
                 <a:cs typeface="Calibri" pitchFamily="34" charset="-120"/>
               </a:rPr>
-              <a:t>It makes people immune to the protist</a:t>
+              <a:t>It stops people being bitten while they sleep</a:t>
             </a:r>
             <a:endParaRPr lang="en-US" sz="2600" dirty="0"/>
           </a:p>
@@ -8514,7 +8514,7 @@
                 <a:ea typeface="Calibri" pitchFamily="34" charset="-122"/>
                 <a:cs typeface="Calibri" pitchFamily="34" charset="-120"/>
               </a:rPr>
-              <a:t>A virus</a:t>
+              <a:t>A protist</a:t>
             </a:r>
             <a:endParaRPr lang="en-US" sz="2400" dirty="0"/>
           </a:p>
@@ -8588,7 +8588,7 @@
                 <a:ea typeface="Calibri" pitchFamily="34" charset="-122"/>
                 <a:cs typeface="Calibri" pitchFamily="34" charset="-120"/>
               </a:rPr>
-              <a:t>A protist</a:t>
+              <a:t>A virus</a:t>
             </a:r>
             <a:endParaRPr lang="en-US" sz="2400" dirty="0"/>
           </a:p>
@@ -10704,7 +10704,7 @@
                 <a:ea typeface="Calibri" pitchFamily="34" charset="-122"/>
                 <a:cs typeface="Calibri" pitchFamily="34" charset="-120"/>
               </a:rPr>
-              <a:t>A virus</a:t>
+              <a:t>A protist</a:t>
             </a:r>
             <a:endParaRPr lang="en-US" sz="2400" dirty="0"/>
           </a:p>
@@ -10778,7 +10778,7 @@
                 <a:ea typeface="Calibri" pitchFamily="34" charset="-122"/>
                 <a:cs typeface="Calibri" pitchFamily="34" charset="-120"/>
               </a:rPr>
-              <a:t>A protist</a:t>
+              <a:t>A virus</a:t>
             </a:r>
             <a:endParaRPr lang="en-US" sz="2400" dirty="0"/>
           </a:p>
@@ -11180,7 +11180,7 @@
                 <a:ea typeface="Calibri" pitchFamily="34" charset="-122"/>
                 <a:cs typeface="Calibri" pitchFamily="34" charset="-120"/>
               </a:rPr>
-              <a:t>Leaves drop early, so less photosynthesis takes place</a:t>
+              <a:t>The stem is blocked, so water cannot reach the leaves</a:t>
             </a:r>
             <a:endParaRPr lang="en-US" sz="2200" dirty="0"/>
           </a:p>
@@ -11217,7 +11217,7 @@
                 <a:ea typeface="Calibri" pitchFamily="34" charset="-122"/>
                 <a:cs typeface="Calibri" pitchFamily="34" charset="-120"/>
               </a:rPr>
-              <a:t>The fungus eats the roots, so the plant cannot take up water</a:t>
+              <a:t>The flowers cannot make pollen</a:t>
             </a:r>
             <a:endParaRPr lang="en-US" sz="2200" dirty="0"/>
           </a:p>
@@ -11254,7 +11254,7 @@
                 <a:ea typeface="Calibri" pitchFamily="34" charset="-122"/>
                 <a:cs typeface="Calibri" pitchFamily="34" charset="-120"/>
               </a:rPr>
-              <a:t>The flowers cannot make pollen</a:t>
+              <a:t>The fungus eats the roots, so the plant cannot take up water</a:t>
             </a:r>
             <a:endParaRPr lang="en-US" sz="2200" dirty="0"/>
           </a:p>
@@ -11291,7 +11291,7 @@
                 <a:ea typeface="Calibri" pitchFamily="34" charset="-122"/>
                 <a:cs typeface="Calibri" pitchFamily="34" charset="-120"/>
               </a:rPr>
-              <a:t>The stem is blocked, so water cannot reach the leaves</a:t>
+              <a:t>Leaves drop early, so less photosynthesis takes place</a:t>
             </a:r>
             <a:endParaRPr lang="en-US" sz="2200" dirty="0"/>
           </a:p>
@@ -12172,7 +12172,7 @@
                 <a:ea typeface="Calibri" pitchFamily="34" charset="-122"/>
                 <a:cs typeface="Calibri" pitchFamily="34" charset="-120"/>
               </a:rPr>
-              <a:t>A   Leaves drop early, so less photosynthesis takes place</a:t>
+              <a:t>D   Leaves drop early, so less photosynthesis takes place</a:t>
             </a:r>
             <a:endParaRPr lang="en-US" sz="2200" dirty="0"/>
           </a:p>

--- a/decks/triple-b5/triple-b5_ch6_fungal-protist.pptx
+++ b/decks/triple-b5/triple-b5_ch6_fungal-protist.pptx
@@ -125,29 +125,29 @@
   <p:extLst>
     <p:ext uri="{521415D9-36F7-43E2-AB2F-B90AF26B5E84}">
       <p14:sectionLst xmlns:p14="http://schemas.microsoft.com/office/powerpoint/2010/main">
-        <p14:section name="Opening" id="{90abaa53-b7b9-e5e8-4dd9-e34562dc80f1}">
+        <p14:section name="Opening" id="{1a0304ef-fd80-a6fb-73c9-874a4e413c6b}">
           <p14:sldIdLst>
             <p14:sldId id="256"/>
           </p14:sldIdLst>
         </p14:section>
-        <p14:section name="Gate" id="{48d7589e-1a28-63ff-d4b9-182c541bb1af}">
+        <p14:section name="Gate" id="{2b40d853-2f68-68b9-a56f-7c04bfbd89e7}">
           <p14:sldIdLst>
             <p14:sldId id="257"/>
             <p14:sldId id="258"/>
           </p14:sldIdLst>
         </p14:section>
-        <p14:section name="Pre-teach" id="{44844d28-d463-7f39-6fa9-84a1e4db3bed}">
+        <p14:section name="Pre-teach" id="{8b99935b-d8cf-758e-c7d8-79981a154de0}">
           <p14:sldIdLst>
             <p14:sldId id="259"/>
           </p14:sldIdLst>
         </p14:section>
-        <p14:section name="Read-along" id="{4ecdab61-fc04-c1aa-4089-75f799fcb5b0}">
+        <p14:section name="Read-along" id="{1ab1f6d9-ef30-4881-7001-2c27b96f40aa}">
           <p14:sldIdLst>
             <p14:sldId id="260"/>
             <p14:sldId id="261"/>
           </p14:sldIdLst>
         </p14:section>
-        <p14:section name="Teach" id="{1334b7de-fa0c-cfb9-4032-6f05312b6fd3}">
+        <p14:section name="Teach" id="{35851366-d419-8d5e-0ea6-0f15d830f455}">
           <p14:sldIdLst>
             <p14:sldId id="262"/>
             <p14:sldId id="263"/>
@@ -156,7 +156,7 @@
             <p14:sldId id="266"/>
           </p14:sldIdLst>
         </p14:section>
-        <p14:section name="Routes" id="{01533bfc-0a41-f984-94a7-8144ffea6703}">
+        <p14:section name="Routes" id="{b736dc58-e18c-b7cd-0b84-81a7dbd07520}">
           <p14:sldIdLst>
             <p14:sldId id="267"/>
             <p14:sldId id="268"/>
@@ -164,12 +164,12 @@
             <p14:sldId id="270"/>
           </p14:sldIdLst>
         </p14:section>
-        <p14:section name="Close" id="{94513018-8821-7823-748d-e32bf5154774}">
+        <p14:section name="Close" id="{557b1e68-f829-ba0e-5ac6-af4aca84ecd9}">
           <p14:sldIdLst>
             <p14:sldId id="271"/>
           </p14:sldIdLst>
         </p14:section>
-        <p14:section name="Answers" id="{a93e1c53-773a-be53-2070-797759433e91}">
+        <p14:section name="Answers" id="{a6eafd6a-760e-f78d-964a-be3d698f644d}">
           <p14:sldIdLst>
             <p14:sldId id="272"/>
             <p14:sldId id="273"/>
